--- a/06-Jenkins/06-Jenkins.pptx
+++ b/06-Jenkins/06-Jenkins.pptx
@@ -3885,7 +3885,7 @@
         </p:nvSpPr>
         <p:spPr>
           <a:xfrm>
-            <a:off x="548640" y="2148840"/>
+            <a:off x="548640" y="1958340"/>
             <a:ext cx="3657600" cy="365760"/>
           </a:xfrm>
           <a:prstGeom prst="rect">
@@ -3924,7 +3924,7 @@
         </p:nvSpPr>
         <p:spPr>
           <a:xfrm>
-            <a:off x="548640" y="2606040"/>
+            <a:off x="548640" y="2415540"/>
             <a:ext cx="8229600" cy="384048"/>
           </a:xfrm>
           <a:prstGeom prst="rect">
@@ -3958,7 +3958,7 @@
         </p:nvSpPr>
         <p:spPr>
           <a:xfrm>
-            <a:off x="548640" y="2606040"/>
+            <a:off x="548640" y="2415540"/>
             <a:ext cx="54864" cy="384048"/>
           </a:xfrm>
           <a:prstGeom prst="rect">
@@ -3985,7 +3985,7 @@
         </p:nvSpPr>
         <p:spPr>
           <a:xfrm>
-            <a:off x="777240" y="2606040"/>
+            <a:off x="777240" y="2415540"/>
             <a:ext cx="2011680" cy="384048"/>
           </a:xfrm>
           <a:prstGeom prst="rect">
@@ -4024,7 +4024,7 @@
         </p:nvSpPr>
         <p:spPr>
           <a:xfrm>
-            <a:off x="2834640" y="2606040"/>
+            <a:off x="2834640" y="2415540"/>
             <a:ext cx="5760720" cy="384048"/>
           </a:xfrm>
           <a:prstGeom prst="rect">
@@ -4063,7 +4063,7 @@
         </p:nvSpPr>
         <p:spPr>
           <a:xfrm>
-            <a:off x="548640" y="3044952"/>
+            <a:off x="548640" y="2854452"/>
             <a:ext cx="8229600" cy="384048"/>
           </a:xfrm>
           <a:prstGeom prst="rect">
@@ -4097,7 +4097,7 @@
         </p:nvSpPr>
         <p:spPr>
           <a:xfrm>
-            <a:off x="548640" y="3044952"/>
+            <a:off x="548640" y="2854452"/>
             <a:ext cx="54864" cy="384048"/>
           </a:xfrm>
           <a:prstGeom prst="rect">
@@ -4124,7 +4124,7 @@
         </p:nvSpPr>
         <p:spPr>
           <a:xfrm>
-            <a:off x="777240" y="3044952"/>
+            <a:off x="777240" y="2854452"/>
             <a:ext cx="2011680" cy="384048"/>
           </a:xfrm>
           <a:prstGeom prst="rect">
@@ -4163,7 +4163,7 @@
         </p:nvSpPr>
         <p:spPr>
           <a:xfrm>
-            <a:off x="2834640" y="3044952"/>
+            <a:off x="2834640" y="2854452"/>
             <a:ext cx="5760720" cy="384048"/>
           </a:xfrm>
           <a:prstGeom prst="rect">
@@ -4202,7 +4202,7 @@
         </p:nvSpPr>
         <p:spPr>
           <a:xfrm>
-            <a:off x="548640" y="3483864"/>
+            <a:off x="548640" y="3293364"/>
             <a:ext cx="8229600" cy="384048"/>
           </a:xfrm>
           <a:prstGeom prst="rect">
@@ -4236,7 +4236,7 @@
         </p:nvSpPr>
         <p:spPr>
           <a:xfrm>
-            <a:off x="548640" y="3483864"/>
+            <a:off x="548640" y="3293364"/>
             <a:ext cx="54864" cy="384048"/>
           </a:xfrm>
           <a:prstGeom prst="rect">
@@ -4263,7 +4263,7 @@
         </p:nvSpPr>
         <p:spPr>
           <a:xfrm>
-            <a:off x="777240" y="3483864"/>
+            <a:off x="777240" y="3293364"/>
             <a:ext cx="2011680" cy="384048"/>
           </a:xfrm>
           <a:prstGeom prst="rect">
@@ -4302,7 +4302,7 @@
         </p:nvSpPr>
         <p:spPr>
           <a:xfrm>
-            <a:off x="2834640" y="3483864"/>
+            <a:off x="2834640" y="3293364"/>
             <a:ext cx="5760720" cy="384048"/>
           </a:xfrm>
           <a:prstGeom prst="rect">
@@ -4341,7 +4341,7 @@
         </p:nvSpPr>
         <p:spPr>
           <a:xfrm>
-            <a:off x="548640" y="3922776"/>
+            <a:off x="548640" y="3732276"/>
             <a:ext cx="8229600" cy="384048"/>
           </a:xfrm>
           <a:prstGeom prst="rect">
@@ -4375,7 +4375,7 @@
         </p:nvSpPr>
         <p:spPr>
           <a:xfrm>
-            <a:off x="548640" y="3922776"/>
+            <a:off x="548640" y="3732276"/>
             <a:ext cx="54864" cy="384048"/>
           </a:xfrm>
           <a:prstGeom prst="rect">
@@ -4402,7 +4402,7 @@
         </p:nvSpPr>
         <p:spPr>
           <a:xfrm>
-            <a:off x="777240" y="3922776"/>
+            <a:off x="777240" y="3732276"/>
             <a:ext cx="2011680" cy="384048"/>
           </a:xfrm>
           <a:prstGeom prst="rect">
@@ -4441,7 +4441,7 @@
         </p:nvSpPr>
         <p:spPr>
           <a:xfrm>
-            <a:off x="2834640" y="3922776"/>
+            <a:off x="2834640" y="3732276"/>
             <a:ext cx="5760720" cy="384048"/>
           </a:xfrm>
           <a:prstGeom prst="rect">
@@ -4480,7 +4480,7 @@
         </p:nvSpPr>
         <p:spPr>
           <a:xfrm>
-            <a:off x="548640" y="4361688"/>
+            <a:off x="548640" y="4171188"/>
             <a:ext cx="8229600" cy="384048"/>
           </a:xfrm>
           <a:prstGeom prst="rect">
@@ -4514,7 +4514,7 @@
         </p:nvSpPr>
         <p:spPr>
           <a:xfrm>
-            <a:off x="548640" y="4361688"/>
+            <a:off x="548640" y="4171188"/>
             <a:ext cx="54864" cy="384048"/>
           </a:xfrm>
           <a:prstGeom prst="rect">
@@ -4541,7 +4541,7 @@
         </p:nvSpPr>
         <p:spPr>
           <a:xfrm>
-            <a:off x="777240" y="4361688"/>
+            <a:off x="777240" y="4171188"/>
             <a:ext cx="2011680" cy="384048"/>
           </a:xfrm>
           <a:prstGeom prst="rect">
@@ -4580,7 +4580,7 @@
         </p:nvSpPr>
         <p:spPr>
           <a:xfrm>
-            <a:off x="2834640" y="4361688"/>
+            <a:off x="2834640" y="4171188"/>
             <a:ext cx="5760720" cy="384048"/>
           </a:xfrm>
           <a:prstGeom prst="rect">
@@ -4619,7 +4619,7 @@
         </p:nvSpPr>
         <p:spPr>
           <a:xfrm>
-            <a:off x="548640" y="4434840"/>
+            <a:off x="548640" y="4614672"/>
             <a:ext cx="8046720" cy="457200"/>
           </a:xfrm>
           <a:prstGeom prst="rect">
@@ -4646,7 +4646,7 @@
         </p:nvSpPr>
         <p:spPr>
           <a:xfrm>
-            <a:off x="548640" y="4434840"/>
+            <a:off x="548640" y="4594860"/>
             <a:ext cx="8046720" cy="457200"/>
           </a:xfrm>
           <a:prstGeom prst="rect">
